--- a/domain-seminars/week10_complex_case_management.pptx
+++ b/domain-seminars/week10_complex_case_management.pptx
@@ -506,7 +506,7 @@
           <a:lstStyle/>
           <a:p>
             <a:r>
-              <a:t>Domain seminar for week 10: Complex Case Management. It follows the course pattern: basics and terminology, where the topic sits in industry and policy, reform goals, how analytics is deployed, and how analytics drives decisions. Replace this note with your own opening remarks.</a:t>
+              <a:t>Domain seminar for week 10: Evidence on Complex Case Management Interventions. It follows the course pattern: basics and terminology, where the topic sits in industry and policy, reform goals, how analytics is deployed, and how analytics drives decisions. Replace this note with your own opening remarks.</a:t>
             </a:r>
           </a:p>
         </p:txBody>
@@ -1506,7 +1506,7 @@
 </p:sldMaster>
 </file>
 
-<file path=ppt/slides/slide11.xml><?xml version="1.0" encoding="utf-8"?>
+<file path=ppt/slides/slide1.xml><?xml version="1.0" encoding="utf-8"?>
 <p:sld xmlns:a="http://schemas.openxmlformats.org/drawingml/2006/main" xmlns:p="http://schemas.openxmlformats.org/presentationml/2006/main" xmlns:r="http://schemas.openxmlformats.org/officeDocument/2006/relationships">
   <p:cSld>
     <p:spTree>
@@ -1548,7 +1548,7 @@
                   <a:srgbClr val="FFFFFF"/>
                 </a:solidFill>
               </a:rPr>
-              <a:t>Complex Case Management</a:t>
+              <a:t>Evidence on Complex Case Management Interventions</a:t>
             </a:r>
             <a:endParaRPr lang="en-US" sz="4000" dirty="0"/>
           </a:p>
@@ -1600,7 +1600,7 @@
 </p:sld>
 </file>
 
-<file path=ppt/slides/slide12.xml><?xml version="1.0" encoding="utf-8"?>
+<file path=ppt/slides/slide2.xml><?xml version="1.0" encoding="utf-8"?>
 <p:sld xmlns:a="http://schemas.openxmlformats.org/drawingml/2006/main" xmlns:p="http://schemas.openxmlformats.org/presentationml/2006/main" xmlns:r="http://schemas.openxmlformats.org/officeDocument/2006/relationships">
   <p:cSld>
     <p:spTree>
@@ -1797,7 +1797,7 @@
 </p:sld>
 </file>
 
-<file path=ppt/slides/slide13.xml><?xml version="1.0" encoding="utf-8"?>
+<file path=ppt/slides/slide3.xml><?xml version="1.0" encoding="utf-8"?>
 <p:sld xmlns:a="http://schemas.openxmlformats.org/drawingml/2006/main" xmlns:p="http://schemas.openxmlformats.org/presentationml/2006/main" xmlns:r="http://schemas.openxmlformats.org/officeDocument/2006/relationships">
   <p:cSld>
     <p:spTree>
@@ -1994,7 +1994,7 @@
 </p:sld>
 </file>
 
-<file path=ppt/slides/slide14.xml><?xml version="1.0" encoding="utf-8"?>
+<file path=ppt/slides/slide4.xml><?xml version="1.0" encoding="utf-8"?>
 <p:sld xmlns:a="http://schemas.openxmlformats.org/drawingml/2006/main" xmlns:p="http://schemas.openxmlformats.org/presentationml/2006/main" xmlns:r="http://schemas.openxmlformats.org/officeDocument/2006/relationships">
   <p:cSld>
     <p:spTree>
@@ -2191,7 +2191,7 @@
 </p:sld>
 </file>
 
-<file path=ppt/slides/slide15.xml><?xml version="1.0" encoding="utf-8"?>
+<file path=ppt/slides/slide5.xml><?xml version="1.0" encoding="utf-8"?>
 <p:sld xmlns:a="http://schemas.openxmlformats.org/drawingml/2006/main" xmlns:p="http://schemas.openxmlformats.org/presentationml/2006/main" xmlns:r="http://schemas.openxmlformats.org/officeDocument/2006/relationships">
   <p:cSld>
     <p:spTree>
@@ -2388,7 +2388,7 @@
 </p:sld>
 </file>
 
-<file path=ppt/slides/slide16.xml><?xml version="1.0" encoding="utf-8"?>
+<file path=ppt/slides/slide6.xml><?xml version="1.0" encoding="utf-8"?>
 <p:sld xmlns:a="http://schemas.openxmlformats.org/drawingml/2006/main" xmlns:p="http://schemas.openxmlformats.org/presentationml/2006/main" xmlns:r="http://schemas.openxmlformats.org/officeDocument/2006/relationships">
   <p:cSld>
     <p:spTree>

--- a/domain-seminars/week10_complex_case_management.pptx
+++ b/domain-seminars/week10_complex_case_management.pptx
@@ -506,7 +506,7 @@
           <a:lstStyle/>
           <a:p>
             <a:r>
-              <a:t>Domain seminar for week 10: Evidence on Complex Case Management Interventions. It follows the course pattern: basics and terminology, where the topic sits in industry and policy, reform goals, how analytics is deployed, and how analytics drives decisions. Replace this note with your own opening remarks.</a:t>
+              <a:t>Domain seminar for week 10: Evidence on Complex Case Management Interventions. We will go through basics and terminology, where the topic is found across industry and policy, reform goals, how analytics is deployed, and how analytics drives decisions. Provide opening remarks here.</a:t>
             </a:r>
           </a:p>
         </p:txBody>

--- a/domain-seminars/week10_complex_case_management.pptx
+++ b/domain-seminars/week10_complex_case_management.pptx
@@ -11,6 +11,7 @@
     <p:sldId id="269" r:id="rId20"/>
     <p:sldId id="270" r:id="rId21"/>
     <p:sldId id="271" r:id="rId22"/>
+    <p:sldId id="272" r:id="rId11"/>
   </p:sldIdLst>
   <p:notesMasterIdLst>
     <p:notesMasterId r:id="rId12"/>
@@ -857,6 +858,76 @@
           <a:p>
             <a:r>
               <a:t>Clinical teams already know A1c and adherence matter. Flexible models can rank many candidate predictors at once and surface ones that aren't obvious. Importance is not causation: treat new findings as hypotheses for clinicians to review, and prioritize the ones a case management program could actually act on.</a:t>
+            </a:r>
+          </a:p>
+        </p:txBody>
+      </p:sp>
+      <p:sp>
+        <p:nvSpPr>
+          <p:cNvPr id="4" name="Slide Number Placeholder 3"/>
+          <p:cNvSpPr>
+            <a:spLocks noGrp="1"/>
+          </p:cNvSpPr>
+          <p:nvPr>
+            <p:ph type="sldNum" idx="5" sz="quarter"/>
+          </p:nvPr>
+        </p:nvSpPr>
+        <p:spPr/>
+      </p:sp>
+    </p:spTree>
+  </p:cSld>
+  <p:clrMapOvr>
+    <a:masterClrMapping/>
+  </p:clrMapOvr>
+</p:notes>
+</file>
+
+<file path=ppt/notesSlides/notesSlide7.xml><?xml version="1.0" encoding="utf-8"?>
+<p:notes xmlns:a="http://schemas.openxmlformats.org/drawingml/2006/main" xmlns:p="http://schemas.openxmlformats.org/presentationml/2006/main" xmlns:r="http://schemas.openxmlformats.org/officeDocument/2006/relationships">
+  <p:cSld>
+    <p:spTree>
+      <p:nvGrpSpPr>
+        <p:cNvPr id="1" name=""/>
+        <p:cNvGrpSpPr/>
+        <p:nvPr/>
+      </p:nvGrpSpPr>
+      <p:grpSpPr>
+        <a:xfrm>
+          <a:off x="0" y="0"/>
+          <a:ext cx="0" cy="0"/>
+          <a:chOff x="0" y="0"/>
+          <a:chExt cx="0" cy="0"/>
+        </a:xfrm>
+      </p:grpSpPr>
+      <p:sp>
+        <p:nvSpPr>
+          <p:cNvPr id="2" name="Slide Image Placeholder 1"/>
+          <p:cNvSpPr>
+            <a:spLocks noGrp="1"/>
+          </p:cNvSpPr>
+          <p:nvPr>
+            <p:ph type="sldImg" idx="2"/>
+          </p:nvPr>
+        </p:nvSpPr>
+        <p:spPr/>
+      </p:sp>
+      <p:sp>
+        <p:nvSpPr>
+          <p:cNvPr id="3" name="Notes Placeholder 2"/>
+          <p:cNvSpPr>
+            <a:spLocks noGrp="1"/>
+          </p:cNvSpPr>
+          <p:nvPr>
+            <p:ph type="body" idx="3" sz="quarter"/>
+          </p:nvPr>
+        </p:nvSpPr>
+        <p:spPr/>
+        <p:txBody>
+          <a:bodyPr/>
+          <a:lstStyle/>
+          <a:p>
+            <a:r>
+              <a:t>Give students a few minutes to write an answer drawn from their own experience and career, then ask two or three to share. Connect their examples back to this seminar's content. In an online section, post the same question to the discussion board.</a:t>
             </a:r>
           </a:p>
         </p:txBody>
@@ -2572,6 +2643,167 @@
             <a:fld id="{F7021451-1387-4CA6-816F-3879F97B5CBC}" type="slidenum">
               <a:rPr b="0" lang="en-US"/>
               <a:t>6</a:t>
+            </a:fld>
+            <a:endParaRPr lang="en-US"/>
+          </a:p>
+        </p:txBody>
+      </p:sp>
+    </p:spTree>
+  </p:cSld>
+  <p:clrMapOvr>
+    <a:masterClrMapping/>
+  </p:clrMapOvr>
+</p:sld>
+</file>
+
+<file path=ppt/slides/slide7.xml><?xml version="1.0" encoding="utf-8"?>
+<p:sld xmlns:a="http://schemas.openxmlformats.org/drawingml/2006/main" xmlns:p="http://schemas.openxmlformats.org/presentationml/2006/main" xmlns:r="http://schemas.openxmlformats.org/officeDocument/2006/relationships">
+  <p:cSld>
+    <p:spTree>
+      <p:nvGrpSpPr>
+        <p:cNvPr id="1" name=""/>
+        <p:cNvGrpSpPr/>
+        <p:nvPr/>
+      </p:nvGrpSpPr>
+      <p:grpSpPr/>
+      <p:sp>
+        <p:nvSpPr>
+          <p:cNvPr id="2" name="Text 0"/>
+          <p:cNvSpPr/>
+          <p:nvPr>
+            <p:ph idx="100" type="title" hasCustomPrompt="1"/>
+          </p:nvPr>
+        </p:nvSpPr>
+        <p:spPr>
+          <a:xfrm>
+            <a:off x="731520" y="457200"/>
+            <a:ext cx="10698480" cy="822960"/>
+          </a:xfrm>
+          <a:prstGeom prst="rect">
+            <a:avLst/>
+          </a:prstGeom>
+          <a:noFill/>
+          <a:ln/>
+        </p:spPr>
+        <p:txBody>
+          <a:bodyPr wrap="square" lIns="0" tIns="0" rIns="0" bIns="0" rtlCol="0" anchor="t"/>
+          <a:lstStyle/>
+          <a:p>
+            <a:pPr algn="l" indent="0" marL="0">
+              <a:buNone/>
+            </a:pPr>
+            <a:r>
+              <a:rPr lang="en-US" sz="3200" b="1" dirty="0">
+                <a:solidFill>
+                  <a:srgbClr val="FFFFFF"/>
+                </a:solidFill>
+              </a:rPr>
+              <a:t>Discussion</a:t>
+            </a:r>
+            <a:endParaRPr lang="en-US" sz="3200" dirty="0"/>
+          </a:p>
+        </p:txBody>
+      </p:sp>
+      <p:sp>
+        <p:nvSpPr>
+          <p:cNvPr id="3" name="Text 0"/>
+          <p:cNvSpPr/>
+          <p:nvPr>
+            <p:ph idx="101" type="body" hasCustomPrompt="1"/>
+          </p:nvPr>
+        </p:nvSpPr>
+        <p:spPr>
+          <a:xfrm>
+            <a:off x="731520" y="1554480"/>
+            <a:ext cx="10698480" cy="4754880"/>
+          </a:xfrm>
+          <a:prstGeom prst="rect">
+            <a:avLst/>
+          </a:prstGeom>
+          <a:noFill/>
+          <a:ln/>
+        </p:spPr>
+        <p:txBody>
+          <a:bodyPr wrap="square" rtlCol="0" anchor="t"/>
+          <a:lstStyle/>
+          <a:p>
+            <a:pPr algn="l" marL="342900" indent="-342900">
+              <a:spcAft>
+                <a:spcPts val="1000"/>
+              </a:spcAft>
+              <a:buSzPct val="100000"/>
+              <a:buChar char="•"/>
+            </a:pPr>
+            <a:r>
+              <a:rPr lang="en-US" sz="2400" dirty="0">
+                <a:solidFill>
+                  <a:srgbClr val="FFFFFF"/>
+                </a:solidFill>
+              </a:rPr>
+              <a:t>Which patients in your setting most need intensive support, and what information would you use to pick the ones a program could actually help?</a:t>
+            </a:r>
+            <a:endParaRPr lang="en-US" sz="2400" dirty="0"/>
+          </a:p>
+          <a:p>
+            <a:pPr algn="l" marL="342900" indent="-342900">
+              <a:spcAft>
+                <a:spcPts val="1000"/>
+              </a:spcAft>
+              <a:buSzPct val="100000"/>
+              <a:buChar char="•"/>
+            </a:pPr>
+            <a:r>
+              <a:rPr lang="en-US" sz="2400" dirty="0">
+                <a:solidFill>
+                  <a:srgbClr val="FFFFFF"/>
+                </a:solidFill>
+              </a:rPr>
+              <a:t>Draw on your own experience and career, and apply today's seminar to that setting.</a:t>
+            </a:r>
+            <a:endParaRPr lang="en-US" sz="2400" dirty="0"/>
+          </a:p>
+        </p:txBody>
+      </p:sp>
+      <p:sp>
+        <p:nvSpPr>
+          <p:cNvPr id="25" name="Slide Number Placeholder 0"/>
+          <p:cNvSpPr>
+            <a:spLocks noGrp="1"/>
+          </p:cNvSpPr>
+          <p:nvPr>
+            <p:ph type="sldNum" sz="quarter" idx="4294967295"/>
+          </p:nvPr>
+        </p:nvSpPr>
+        <p:spPr>
+          <a:xfrm>
+            <a:off x="10972800" y="6400800"/>
+            <a:ext cx="548640" cy="274320"/>
+          </a:xfrm>
+          <a:prstGeom prst="rect">
+            <a:avLst/>
+          </a:prstGeom>
+          <a:extLst>
+            <a:ext uri="{C572A759-6A51-4108-AA02-DFA0A04FC94B}">
+              <ma14:wrappingTextBoxFlag xmlns:ma14="http://schemas.microsoft.com/office/mac/drawingml/2011/main" val="0"/>
+            </a:ext>
+          </a:extLst>
+        </p:spPr>
+        <p:txBody>
+          <a:bodyPr/>
+          <a:lstStyle>
+            <a:lvl1pPr>
+              <a:defRPr sz="1000">
+                <a:solidFill>
+                  <a:srgbClr val="BFBFBF"/>
+                </a:solidFill>
+              </a:defRPr>
+            </a:lvl1pPr>
+          </a:lstStyle>
+          <a:p>
+            <a:pPr algn="r"/>
+            <a:fld id="{F7021451-1387-4CA6-816F-3879F97B5CBC}" type="slidenum">
+              <a:rPr b="0" lang="en-US"/>
+              <a:t>7</a:t>
             </a:fld>
             <a:endParaRPr lang="en-US"/>
           </a:p>

--- a/domain-seminars/week10_complex_case_management.pptx
+++ b/domain-seminars/week10_complex_case_management.pptx
@@ -1619,7 +1619,7 @@
                   <a:srgbClr val="FFFFFF"/>
                 </a:solidFill>
               </a:rPr>
-              <a:t>Evidence on Complex Case Management Interventions</a:t>
+              <a:t>Week 10: Evidence on Complex Case Management Interventions</a:t>
             </a:r>
             <a:endParaRPr lang="en-US" sz="4000" dirty="0"/>
           </a:p>
